--- a/outputs/pitch/pitch_deck_aicamp.pptx
+++ b/outputs/pitch/pitch_deck_aicamp.pptx
@@ -5052,7 +5052,7 @@
                 <a:ea typeface="Leelawadee"/>
                 <a:cs typeface="Leelawadee"/>
               </a:rPr>
-              <a:t>•  ERA5 มี latency → ระบบจริงต้องใช้ NWP forecast; วัดผลแล้ว: edge 48h ทนต่อ noise ถึง 0.5× ความผันผวนธรรมชาติ</a:t>
+              <a:t>•  ERA5 มี latency → ระบบจริงต้องใช้ NWP forecast; วัดผลแล้ว: edge 48h ทนได้เมื่อ noise &lt; 0.5× ความผันผวนธรรมชาติ (ที่ 0.5× เริ่มแพ้)</a:t>
             </a:r>
           </a:p>
           <a:p>
